--- a/Capstone2_Kickstarter_Fahad_Memon.pptx
+++ b/Capstone2_Kickstarter_Fahad_Memon.pptx
@@ -1530,26 +1530,8 @@
               </a:spcAft>
               <a:buNone/>
             </a:pPr>
-            <a:br>
-              <a:rPr lang="en-US"/>
-            </a:br>
-            <a:r>
-              <a:rPr lang="en-US"/>
-              <a:t>[Sources]</a:t>
-            </a:r>
-            <a:br>
-              <a:rPr lang="en-US"/>
-            </a:br>
-            <a:r>
-              <a:rPr lang="en-US"/>
-              <a:t>- Uploaded notebooks, cleaned dataset, train/test files, and final project report in this conversation.</a:t>
-            </a:r>
-            <a:br>
-              <a:rPr lang="en-US"/>
-            </a:br>
-            <a:r>
-              <a:rPr lang="en-US"/>
-              <a:t>[/Sources]</a:t>
+            <a:r>
+              <a:t/>
             </a:r>
             <a:endParaRPr/>
           </a:p>
@@ -1705,33 +1687,8 @@
               </a:spcAft>
               <a:buNone/>
             </a:pPr>
-            <a:br>
-              <a:rPr lang="en-US"/>
-            </a:br>
-            <a:r>
-              <a:rPr lang="en-US"/>
-              <a:t>[Sources]</a:t>
-            </a:r>
-            <a:br>
-              <a:rPr lang="en-US"/>
-            </a:br>
-            <a:r>
-              <a:rPr lang="en-US"/>
-              <a:t>- figure3_confusion_matrix.png</a:t>
-            </a:r>
-            <a:br>
-              <a:rPr lang="en-US"/>
-            </a:br>
-            <a:r>
-              <a:rPr lang="en-US"/>
-              <a:t>- kickstarter_final_project_report.docx</a:t>
-            </a:r>
-            <a:br>
-              <a:rPr lang="en-US"/>
-            </a:br>
-            <a:r>
-              <a:rPr lang="en-US"/>
-              <a:t>[/Sources]</a:t>
+            <a:r>
+              <a:t/>
             </a:r>
             <a:endParaRPr/>
           </a:p>
@@ -1887,40 +1844,8 @@
               </a:spcAft>
               <a:buNone/>
             </a:pPr>
-            <a:br>
-              <a:rPr lang="en-US"/>
-            </a:br>
-            <a:r>
-              <a:rPr lang="en-US"/>
-              <a:t>[Sources]</a:t>
-            </a:r>
-            <a:br>
-              <a:rPr lang="en-US"/>
-            </a:br>
-            <a:r>
-              <a:rPr lang="en-US"/>
-              <a:t>- figure4_feature_importance.png</a:t>
-            </a:r>
-            <a:br>
-              <a:rPr lang="en-US"/>
-            </a:br>
-            <a:r>
-              <a:rPr lang="en-US"/>
-              <a:t>- modeling.ipynb</a:t>
-            </a:r>
-            <a:br>
-              <a:rPr lang="en-US"/>
-            </a:br>
-            <a:r>
-              <a:rPr lang="en-US"/>
-              <a:t>- kickstarter_final_project_report.docx</a:t>
-            </a:r>
-            <a:br>
-              <a:rPr lang="en-US"/>
-            </a:br>
-            <a:r>
-              <a:rPr lang="en-US"/>
-              <a:t>[/Sources]</a:t>
+            <a:r>
+              <a:t/>
             </a:r>
             <a:endParaRPr/>
           </a:p>
@@ -2076,26 +2001,8 @@
               </a:spcAft>
               <a:buNone/>
             </a:pPr>
-            <a:br>
-              <a:rPr lang="en-US"/>
-            </a:br>
-            <a:r>
-              <a:rPr lang="en-US"/>
-              <a:t>[Sources]</a:t>
-            </a:r>
-            <a:br>
-              <a:rPr lang="en-US"/>
-            </a:br>
-            <a:r>
-              <a:rPr lang="en-US"/>
-              <a:t>- kickstarter_final_project_report.docx</a:t>
-            </a:r>
-            <a:br>
-              <a:rPr lang="en-US"/>
-            </a:br>
-            <a:r>
-              <a:rPr lang="en-US"/>
-              <a:t>[/Sources]</a:t>
+            <a:r>
+              <a:t/>
             </a:r>
             <a:endParaRPr/>
           </a:p>
@@ -2251,26 +2158,8 @@
               </a:spcAft>
               <a:buNone/>
             </a:pPr>
-            <a:br>
-              <a:rPr lang="en-US"/>
-            </a:br>
-            <a:r>
-              <a:rPr lang="en-US"/>
-              <a:t>[Sources]</a:t>
-            </a:r>
-            <a:br>
-              <a:rPr lang="en-US"/>
-            </a:br>
-            <a:r>
-              <a:rPr lang="en-US"/>
-              <a:t>- kickstarter_final_project_report.docx</a:t>
-            </a:r>
-            <a:br>
-              <a:rPr lang="en-US"/>
-            </a:br>
-            <a:r>
-              <a:rPr lang="en-US"/>
-              <a:t>[/Sources]</a:t>
+            <a:r>
+              <a:t/>
             </a:r>
             <a:endParaRPr/>
           </a:p>
@@ -2426,26 +2315,8 @@
               </a:spcAft>
               <a:buNone/>
             </a:pPr>
-            <a:br>
-              <a:rPr lang="en-US"/>
-            </a:br>
-            <a:r>
-              <a:rPr lang="en-US"/>
-              <a:t>[Sources]</a:t>
-            </a:r>
-            <a:br>
-              <a:rPr lang="en-US"/>
-            </a:br>
-            <a:r>
-              <a:rPr lang="en-US"/>
-              <a:t>- kickstarter_final_project_report.docx</a:t>
-            </a:r>
-            <a:br>
-              <a:rPr lang="en-US"/>
-            </a:br>
-            <a:r>
-              <a:rPr lang="en-US"/>
-              <a:t>[/Sources]</a:t>
+            <a:r>
+              <a:t/>
             </a:r>
             <a:endParaRPr/>
           </a:p>
@@ -2601,40 +2472,8 @@
               </a:spcAft>
               <a:buNone/>
             </a:pPr>
-            <a:br>
-              <a:rPr lang="en-US"/>
-            </a:br>
-            <a:r>
-              <a:rPr lang="en-US"/>
-              <a:t>[Sources]</a:t>
-            </a:r>
-            <a:br>
-              <a:rPr lang="en-US"/>
-            </a:br>
-            <a:r>
-              <a:rPr lang="en-US"/>
-              <a:t>- data_wrangling.ipynb</a:t>
-            </a:r>
-            <a:br>
-              <a:rPr lang="en-US"/>
-            </a:br>
-            <a:r>
-              <a:rPr lang="en-US"/>
-              <a:t>- pre_processing.ipynb</a:t>
-            </a:r>
-            <a:br>
-              <a:rPr lang="en-US"/>
-            </a:br>
-            <a:r>
-              <a:rPr lang="en-US"/>
-              <a:t>- kickstarter_final_project_report.docx</a:t>
-            </a:r>
-            <a:br>
-              <a:rPr lang="en-US"/>
-            </a:br>
-            <a:r>
-              <a:rPr lang="en-US"/>
-              <a:t>[/Sources]</a:t>
+            <a:r>
+              <a:t/>
             </a:r>
             <a:endParaRPr/>
           </a:p>
@@ -2790,61 +2629,8 @@
               </a:spcAft>
               <a:buNone/>
             </a:pPr>
-            <a:br>
-              <a:rPr lang="en-US"/>
-            </a:br>
-            <a:r>
-              <a:rPr lang="en-US"/>
-              <a:t>[Sources]</a:t>
-            </a:r>
-            <a:br>
-              <a:rPr lang="en-US"/>
-            </a:br>
-            <a:r>
-              <a:rPr lang="en-US"/>
-              <a:t>- data_wrangling.ipynb</a:t>
-            </a:r>
-            <a:br>
-              <a:rPr lang="en-US"/>
-            </a:br>
-            <a:r>
-              <a:rPr lang="en-US"/>
-              <a:t>- exploratory_data_analysis.ipynb</a:t>
-            </a:r>
-            <a:br>
-              <a:rPr lang="en-US"/>
-            </a:br>
-            <a:r>
-              <a:rPr lang="en-US"/>
-              <a:t>- pre_processing.ipynb</a:t>
-            </a:r>
-            <a:br>
-              <a:rPr lang="en-US"/>
-            </a:br>
-            <a:r>
-              <a:rPr lang="en-US"/>
-              <a:t>- modeling.ipynb</a:t>
-            </a:r>
-            <a:br>
-              <a:rPr lang="en-US"/>
-            </a:br>
-            <a:r>
-              <a:rPr lang="en-US"/>
-              <a:t>- X_train_preprocessed.csv</a:t>
-            </a:r>
-            <a:br>
-              <a:rPr lang="en-US"/>
-            </a:br>
-            <a:r>
-              <a:rPr lang="en-US"/>
-              <a:t>- X_test_preprocessed.csv</a:t>
-            </a:r>
-            <a:br>
-              <a:rPr lang="en-US"/>
-            </a:br>
-            <a:r>
-              <a:rPr lang="en-US"/>
-              <a:t>[/Sources]</a:t>
+            <a:r>
+              <a:t/>
             </a:r>
             <a:endParaRPr/>
           </a:p>
@@ -3000,54 +2786,8 @@
               </a:spcAft>
               <a:buNone/>
             </a:pPr>
-            <a:br>
-              <a:rPr lang="en-US"/>
-            </a:br>
-            <a:r>
-              <a:rPr lang="en-US"/>
-              <a:t>[Sources]</a:t>
-            </a:r>
-            <a:br>
-              <a:rPr lang="en-US"/>
-            </a:br>
-            <a:r>
-              <a:rPr lang="en-US"/>
-              <a:t>- kickstarter_cleaned.csv</a:t>
-            </a:r>
-            <a:br>
-              <a:rPr lang="en-US"/>
-            </a:br>
-            <a:r>
-              <a:rPr lang="en-US"/>
-              <a:t>- y_train.csv</a:t>
-            </a:r>
-            <a:br>
-              <a:rPr lang="en-US"/>
-            </a:br>
-            <a:r>
-              <a:rPr lang="en-US"/>
-              <a:t>- y_test.csv</a:t>
-            </a:r>
-            <a:br>
-              <a:rPr lang="en-US"/>
-            </a:br>
-            <a:r>
-              <a:rPr lang="en-US"/>
-              <a:t>- exploratory_data_analysis.ipynb</a:t>
-            </a:r>
-            <a:br>
-              <a:rPr lang="en-US"/>
-            </a:br>
-            <a:r>
-              <a:rPr lang="en-US"/>
-              <a:t>- kickstarter_final_project_report.docx</a:t>
-            </a:r>
-            <a:br>
-              <a:rPr lang="en-US"/>
-            </a:br>
-            <a:r>
-              <a:rPr lang="en-US"/>
-              <a:t>[/Sources]</a:t>
+            <a:r>
+              <a:t/>
             </a:r>
             <a:endParaRPr/>
           </a:p>
@@ -3203,40 +2943,8 @@
               </a:spcAft>
               <a:buNone/>
             </a:pPr>
-            <a:br>
-              <a:rPr lang="en-US"/>
-            </a:br>
-            <a:r>
-              <a:rPr lang="en-US"/>
-              <a:t>[Sources]</a:t>
-            </a:r>
-            <a:br>
-              <a:rPr lang="en-US"/>
-            </a:br>
-            <a:r>
-              <a:rPr lang="en-US"/>
-              <a:t>- figure1_category_success.png</a:t>
-            </a:r>
-            <a:br>
-              <a:rPr lang="en-US"/>
-            </a:br>
-            <a:r>
-              <a:rPr lang="en-US"/>
-              <a:t>- exploratory_data_analysis.ipynb</a:t>
-            </a:r>
-            <a:br>
-              <a:rPr lang="en-US"/>
-            </a:br>
-            <a:r>
-              <a:rPr lang="en-US"/>
-              <a:t>- kickstarter_final_project_report.docx</a:t>
-            </a:r>
-            <a:br>
-              <a:rPr lang="en-US"/>
-            </a:br>
-            <a:r>
-              <a:rPr lang="en-US"/>
-              <a:t>[/Sources]</a:t>
+            <a:r>
+              <a:t/>
             </a:r>
             <a:endParaRPr/>
           </a:p>
@@ -3392,40 +3100,8 @@
               </a:spcAft>
               <a:buNone/>
             </a:pPr>
-            <a:br>
-              <a:rPr lang="en-US"/>
-            </a:br>
-            <a:r>
-              <a:rPr lang="en-US"/>
-              <a:t>[Sources]</a:t>
-            </a:r>
-            <a:br>
-              <a:rPr lang="en-US"/>
-            </a:br>
-            <a:r>
-              <a:rPr lang="en-US"/>
-              <a:t>- figure2_goal_success.png</a:t>
-            </a:r>
-            <a:br>
-              <a:rPr lang="en-US"/>
-            </a:br>
-            <a:r>
-              <a:rPr lang="en-US"/>
-              <a:t>- exploratory_data_analysis.ipynb</a:t>
-            </a:r>
-            <a:br>
-              <a:rPr lang="en-US"/>
-            </a:br>
-            <a:r>
-              <a:rPr lang="en-US"/>
-              <a:t>- kickstarter_final_project_report.docx</a:t>
-            </a:r>
-            <a:br>
-              <a:rPr lang="en-US"/>
-            </a:br>
-            <a:r>
-              <a:rPr lang="en-US"/>
-              <a:t>[/Sources]</a:t>
+            <a:r>
+              <a:t/>
             </a:r>
             <a:endParaRPr/>
           </a:p>
@@ -3837,33 +3513,8 @@
               </a:spcAft>
               <a:buNone/>
             </a:pPr>
-            <a:br>
-              <a:rPr lang="en-US"/>
-            </a:br>
-            <a:r>
-              <a:rPr lang="en-US"/>
-              <a:t>[Sources]</a:t>
-            </a:r>
-            <a:br>
-              <a:rPr lang="en-US"/>
-            </a:br>
-            <a:r>
-              <a:rPr lang="en-US"/>
-              <a:t>- modeling.ipynb</a:t>
-            </a:r>
-            <a:br>
-              <a:rPr lang="en-US"/>
-            </a:br>
-            <a:r>
-              <a:rPr lang="en-US"/>
-              <a:t>- kickstarter_final_project_report.docx</a:t>
-            </a:r>
-            <a:br>
-              <a:rPr lang="en-US"/>
-            </a:br>
-            <a:r>
-              <a:rPr lang="en-US"/>
-              <a:t>[/Sources]</a:t>
+            <a:r>
+              <a:t/>
             </a:r>
             <a:endParaRPr/>
           </a:p>
